--- a/slide/themes/src/19_galaxy.pptx
+++ b/slide/themes/src/19_galaxy.pptx
@@ -675,7 +675,7 @@
             <a:spLocks noGrp="1"/>
           </p:cNvSpPr>
           <p:nvPr>
-            <p:ph type="title"/>
+            <p:ph type="ctrTitle"/>
           </p:nvPr>
         </p:nvSpPr>
         <p:spPr bwMode="auto">
@@ -688,13 +688,10 @@
           <a:bodyPr/>
           <a:lstStyle>
             <a:lvl1pPr algn="ctr">
-              <a:defRPr sz="3200" b="0" spc="198">
-                <a:solidFill>
-                  <a:schemeClr val="bg1"/>
-                </a:solidFill>
-                <a:latin typeface="Open Sans"/>
-                <a:ea typeface="Open Sans"/>
-                <a:cs typeface="Open Sans"/>
+              <a:defRPr sz="5600" b="0" spc="141">
+                <a:solidFill>
+                  <a:schemeClr val="bg1"/>
+                </a:solidFill>
               </a:defRPr>
             </a:lvl1pPr>
           </a:lstStyle>
@@ -707,11 +704,48 @@
                 <a:solidFill>
                   <a:schemeClr val="bg1"/>
                 </a:solidFill>
-                <a:latin typeface="Open Sans"/>
-                <a:ea typeface="Open Sans"/>
-                <a:cs typeface="Open Sans"/>
               </a:rPr>
               <a:t>GALAXY</a:t>
+            </a:r>
+            <a:endParaRPr lang="en-US"/>
+          </a:p>
+        </p:txBody>
+      </p:sp>
+      <p:sp>
+        <p:nvSpPr>
+          <p:cNvPr id="2" name="Subtitle 2"/>
+          <p:cNvSpPr>
+            <a:spLocks noGrp="1"/>
+          </p:cNvSpPr>
+          <p:nvPr>
+            <p:ph type="subTitle" idx="1"/>
+          </p:nvPr>
+        </p:nvSpPr>
+        <p:spPr bwMode="auto">
+          <a:xfrm flipH="0" flipV="0">
+            <a:off x="1716666" y="4148665"/>
+            <a:ext cx="8762999" cy="2053166"/>
+          </a:xfrm>
+        </p:spPr>
+        <p:txBody>
+          <a:bodyPr/>
+          <a:lstStyle>
+            <a:lvl1pPr marL="0" indent="0" algn="ctr">
+              <a:buNone/>
+              <a:defRPr sz="2400" b="0" spc="141">
+                <a:solidFill>
+                  <a:schemeClr val="bg1"/>
+                </a:solidFill>
+              </a:defRPr>
+            </a:lvl1pPr>
+          </a:lstStyle>
+          <a:p>
+            <a:pPr>
+              <a:defRPr/>
+            </a:pPr>
+            <a:r>
+              <a:rPr lang="en-US"/>
+              <a:t>Click to edit Master subtitle style</a:t>
             </a:r>
             <a:endParaRPr lang="en-US"/>
           </a:p>
@@ -1166,9 +1200,6 @@
                 <a:solidFill>
                   <a:schemeClr val="bg1"/>
                 </a:solidFill>
-                <a:latin typeface="Open Sans"/>
-                <a:ea typeface="Open Sans"/>
-                <a:cs typeface="Open Sans"/>
               </a:defRPr>
             </a:lvl1pPr>
           </a:lstStyle>
@@ -1208,9 +1239,6 @@
                 <a:solidFill>
                   <a:schemeClr val="bg1"/>
                 </a:solidFill>
-                <a:latin typeface="Open Sans"/>
-                <a:ea typeface="Open Sans"/>
-                <a:cs typeface="Open Sans"/>
               </a:defRPr>
             </a:lvl1pPr>
             <a:lvl2pPr>
@@ -1218,9 +1246,6 @@
                 <a:solidFill>
                   <a:schemeClr val="bg1"/>
                 </a:solidFill>
-                <a:latin typeface="Open Sans"/>
-                <a:ea typeface="Open Sans"/>
-                <a:cs typeface="Open Sans"/>
               </a:defRPr>
             </a:lvl2pPr>
             <a:lvl3pPr>
@@ -1228,9 +1253,6 @@
                 <a:solidFill>
                   <a:schemeClr val="bg1"/>
                 </a:solidFill>
-                <a:latin typeface="Open Sans"/>
-                <a:ea typeface="Open Sans"/>
-                <a:cs typeface="Open Sans"/>
               </a:defRPr>
             </a:lvl3pPr>
             <a:lvl4pPr>
@@ -1238,9 +1260,6 @@
                 <a:solidFill>
                   <a:schemeClr val="bg1"/>
                 </a:solidFill>
-                <a:latin typeface="Open Sans"/>
-                <a:ea typeface="Open Sans"/>
-                <a:cs typeface="Open Sans"/>
               </a:defRPr>
             </a:lvl4pPr>
             <a:lvl5pPr>
@@ -1248,9 +1267,6 @@
                 <a:solidFill>
                   <a:schemeClr val="bg1"/>
                 </a:solidFill>
-                <a:latin typeface="Open Sans"/>
-                <a:ea typeface="Open Sans"/>
-                <a:cs typeface="Open Sans"/>
               </a:defRPr>
             </a:lvl5pPr>
           </a:lstStyle>
@@ -1442,9 +1458,6 @@
                 <a:solidFill>
                   <a:schemeClr val="bg1"/>
                 </a:solidFill>
-                <a:latin typeface="Open Sans"/>
-                <a:ea typeface="Open Sans"/>
-                <a:cs typeface="Open Sans"/>
               </a:defRPr>
             </a:lvl1pPr>
           </a:lstStyle>
@@ -1485,9 +1498,6 @@
                 <a:solidFill>
                   <a:schemeClr val="bg1"/>
                 </a:solidFill>
-                <a:latin typeface="Open Sans"/>
-                <a:ea typeface="Open Sans"/>
-                <a:cs typeface="Open Sans"/>
               </a:defRPr>
             </a:lvl1pPr>
             <a:lvl2pPr marL="457200" indent="0">
@@ -1718,66 +1728,31 @@
                     <a:lumMod val="75000"/>
                   </a:schemeClr>
                 </a:solidFill>
-                <a:latin typeface="Open Sans"/>
-                <a:ea typeface="Open Sans"/>
-                <a:cs typeface="Open Sans"/>
               </a:defRPr>
             </a:lvl1pPr>
             <a:lvl2pPr>
-              <a:defRPr>
-                <a:latin typeface="Open Sans"/>
-                <a:ea typeface="Open Sans"/>
-                <a:cs typeface="Open Sans"/>
-              </a:defRPr>
+              <a:defRPr/>
             </a:lvl2pPr>
             <a:lvl3pPr>
-              <a:defRPr>
-                <a:latin typeface="Open Sans"/>
-                <a:ea typeface="Open Sans"/>
-                <a:cs typeface="Open Sans"/>
-              </a:defRPr>
+              <a:defRPr/>
             </a:lvl3pPr>
             <a:lvl4pPr>
-              <a:defRPr>
-                <a:latin typeface="Open Sans"/>
-                <a:ea typeface="Open Sans"/>
-                <a:cs typeface="Open Sans"/>
-              </a:defRPr>
+              <a:defRPr/>
             </a:lvl4pPr>
             <a:lvl5pPr>
-              <a:defRPr>
-                <a:latin typeface="Open Sans"/>
-                <a:ea typeface="Open Sans"/>
-                <a:cs typeface="Open Sans"/>
-              </a:defRPr>
+              <a:defRPr/>
             </a:lvl5pPr>
             <a:lvl6pPr>
-              <a:defRPr>
-                <a:latin typeface="Open Sans"/>
-                <a:ea typeface="Open Sans"/>
-                <a:cs typeface="Open Sans"/>
-              </a:defRPr>
+              <a:defRPr/>
             </a:lvl6pPr>
             <a:lvl7pPr>
-              <a:defRPr>
-                <a:latin typeface="Open Sans"/>
-                <a:ea typeface="Open Sans"/>
-                <a:cs typeface="Open Sans"/>
-              </a:defRPr>
+              <a:defRPr/>
             </a:lvl7pPr>
             <a:lvl8pPr>
-              <a:defRPr>
-                <a:latin typeface="Open Sans"/>
-                <a:ea typeface="Open Sans"/>
-                <a:cs typeface="Open Sans"/>
-              </a:defRPr>
+              <a:defRPr/>
             </a:lvl8pPr>
             <a:lvl9pPr>
-              <a:defRPr>
-                <a:latin typeface="Open Sans"/>
-                <a:ea typeface="Open Sans"/>
-                <a:cs typeface="Open Sans"/>
-              </a:defRPr>
+              <a:defRPr/>
             </a:lvl9pPr>
           </a:lstStyle>
           <a:p>
@@ -1818,9 +1793,6 @@
                     <a:lumMod val="50000"/>
                   </a:schemeClr>
                 </a:solidFill>
-                <a:latin typeface="Open Sans"/>
-                <a:ea typeface="Open Sans"/>
-                <a:cs typeface="Open Sans"/>
               </a:defRPr>
             </a:lvl1pPr>
             <a:lvl2pPr>
@@ -1830,9 +1802,6 @@
                     <a:lumMod val="50000"/>
                   </a:schemeClr>
                 </a:solidFill>
-                <a:latin typeface="Open Sans"/>
-                <a:ea typeface="Open Sans"/>
-                <a:cs typeface="Open Sans"/>
               </a:defRPr>
             </a:lvl2pPr>
             <a:lvl3pPr>
@@ -1842,9 +1811,6 @@
                     <a:lumMod val="50000"/>
                   </a:schemeClr>
                 </a:solidFill>
-                <a:latin typeface="Open Sans"/>
-                <a:ea typeface="Open Sans"/>
-                <a:cs typeface="Open Sans"/>
               </a:defRPr>
             </a:lvl3pPr>
             <a:lvl4pPr>
@@ -1854,9 +1820,6 @@
                     <a:lumMod val="50000"/>
                   </a:schemeClr>
                 </a:solidFill>
-                <a:latin typeface="Open Sans"/>
-                <a:ea typeface="Open Sans"/>
-                <a:cs typeface="Open Sans"/>
               </a:defRPr>
             </a:lvl4pPr>
             <a:lvl5pPr>
@@ -1866,38 +1829,19 @@
                     <a:lumMod val="50000"/>
                   </a:schemeClr>
                 </a:solidFill>
-                <a:latin typeface="Open Sans"/>
-                <a:ea typeface="Open Sans"/>
-                <a:cs typeface="Open Sans"/>
               </a:defRPr>
             </a:lvl5pPr>
             <a:lvl6pPr>
-              <a:defRPr>
-                <a:latin typeface="Open Sans"/>
-                <a:ea typeface="Open Sans"/>
-                <a:cs typeface="Open Sans"/>
-              </a:defRPr>
+              <a:defRPr/>
             </a:lvl6pPr>
             <a:lvl7pPr>
-              <a:defRPr>
-                <a:latin typeface="Open Sans"/>
-                <a:ea typeface="Open Sans"/>
-                <a:cs typeface="Open Sans"/>
-              </a:defRPr>
+              <a:defRPr/>
             </a:lvl7pPr>
             <a:lvl8pPr>
-              <a:defRPr>
-                <a:latin typeface="Open Sans"/>
-                <a:ea typeface="Open Sans"/>
-                <a:cs typeface="Open Sans"/>
-              </a:defRPr>
+              <a:defRPr/>
             </a:lvl8pPr>
             <a:lvl9pPr>
-              <a:defRPr>
-                <a:latin typeface="Open Sans"/>
-                <a:ea typeface="Open Sans"/>
-                <a:cs typeface="Open Sans"/>
-              </a:defRPr>
+              <a:defRPr/>
             </a:lvl9pPr>
           </a:lstStyle>
           <a:p>
@@ -2015,67 +1959,31 @@
           <a:bodyPr/>
           <a:lstStyle>
             <a:lvl1pPr>
-              <a:defRPr>
-                <a:latin typeface="Open Sans"/>
-                <a:ea typeface="Open Sans"/>
-                <a:cs typeface="Open Sans"/>
-              </a:defRPr>
+              <a:defRPr/>
             </a:lvl1pPr>
             <a:lvl2pPr>
-              <a:defRPr>
-                <a:latin typeface="Open Sans"/>
-                <a:ea typeface="Open Sans"/>
-                <a:cs typeface="Open Sans"/>
-              </a:defRPr>
+              <a:defRPr/>
             </a:lvl2pPr>
             <a:lvl3pPr>
-              <a:defRPr>
-                <a:latin typeface="Open Sans"/>
-                <a:ea typeface="Open Sans"/>
-                <a:cs typeface="Open Sans"/>
-              </a:defRPr>
+              <a:defRPr/>
             </a:lvl3pPr>
             <a:lvl4pPr>
-              <a:defRPr>
-                <a:latin typeface="Open Sans"/>
-                <a:ea typeface="Open Sans"/>
-                <a:cs typeface="Open Sans"/>
-              </a:defRPr>
+              <a:defRPr/>
             </a:lvl4pPr>
             <a:lvl5pPr>
-              <a:defRPr>
-                <a:latin typeface="Open Sans"/>
-                <a:ea typeface="Open Sans"/>
-                <a:cs typeface="Open Sans"/>
-              </a:defRPr>
+              <a:defRPr/>
             </a:lvl5pPr>
             <a:lvl6pPr>
-              <a:defRPr>
-                <a:latin typeface="Open Sans"/>
-                <a:ea typeface="Open Sans"/>
-                <a:cs typeface="Open Sans"/>
-              </a:defRPr>
+              <a:defRPr/>
             </a:lvl6pPr>
             <a:lvl7pPr>
-              <a:defRPr>
-                <a:latin typeface="Open Sans"/>
-                <a:ea typeface="Open Sans"/>
-                <a:cs typeface="Open Sans"/>
-              </a:defRPr>
+              <a:defRPr/>
             </a:lvl7pPr>
             <a:lvl8pPr>
-              <a:defRPr>
-                <a:latin typeface="Open Sans"/>
-                <a:ea typeface="Open Sans"/>
-                <a:cs typeface="Open Sans"/>
-              </a:defRPr>
+              <a:defRPr/>
             </a:lvl8pPr>
             <a:lvl9pPr>
-              <a:defRPr>
-                <a:latin typeface="Open Sans"/>
-                <a:ea typeface="Open Sans"/>
-                <a:cs typeface="Open Sans"/>
-              </a:defRPr>
+              <a:defRPr/>
             </a:lvl9pPr>
           </a:lstStyle>
           <a:p>
@@ -2417,66 +2325,31 @@
                     <a:lumMod val="75000"/>
                   </a:schemeClr>
                 </a:solidFill>
-                <a:latin typeface="Open Sans"/>
-                <a:ea typeface="Open Sans"/>
-                <a:cs typeface="Open Sans"/>
               </a:defRPr>
             </a:lvl1pPr>
             <a:lvl2pPr>
-              <a:defRPr>
-                <a:latin typeface="Open Sans"/>
-                <a:ea typeface="Open Sans"/>
-                <a:cs typeface="Open Sans"/>
-              </a:defRPr>
+              <a:defRPr/>
             </a:lvl2pPr>
             <a:lvl3pPr>
-              <a:defRPr>
-                <a:latin typeface="Open Sans"/>
-                <a:ea typeface="Open Sans"/>
-                <a:cs typeface="Open Sans"/>
-              </a:defRPr>
+              <a:defRPr/>
             </a:lvl3pPr>
             <a:lvl4pPr>
-              <a:defRPr>
-                <a:latin typeface="Open Sans"/>
-                <a:ea typeface="Open Sans"/>
-                <a:cs typeface="Open Sans"/>
-              </a:defRPr>
+              <a:defRPr/>
             </a:lvl4pPr>
             <a:lvl5pPr>
-              <a:defRPr>
-                <a:latin typeface="Open Sans"/>
-                <a:ea typeface="Open Sans"/>
-                <a:cs typeface="Open Sans"/>
-              </a:defRPr>
+              <a:defRPr/>
             </a:lvl5pPr>
             <a:lvl6pPr>
-              <a:defRPr>
-                <a:latin typeface="Open Sans"/>
-                <a:ea typeface="Open Sans"/>
-                <a:cs typeface="Open Sans"/>
-              </a:defRPr>
+              <a:defRPr/>
             </a:lvl6pPr>
             <a:lvl7pPr>
-              <a:defRPr>
-                <a:latin typeface="Open Sans"/>
-                <a:ea typeface="Open Sans"/>
-                <a:cs typeface="Open Sans"/>
-              </a:defRPr>
+              <a:defRPr/>
             </a:lvl7pPr>
             <a:lvl8pPr>
-              <a:defRPr>
-                <a:latin typeface="Open Sans"/>
-                <a:ea typeface="Open Sans"/>
-                <a:cs typeface="Open Sans"/>
-              </a:defRPr>
+              <a:defRPr/>
             </a:lvl8pPr>
             <a:lvl9pPr>
-              <a:defRPr>
-                <a:latin typeface="Open Sans"/>
-                <a:ea typeface="Open Sans"/>
-                <a:cs typeface="Open Sans"/>
-              </a:defRPr>
+              <a:defRPr/>
             </a:lvl9pPr>
           </a:lstStyle>
           <a:p>
@@ -2517,9 +2390,6 @@
                     <a:lumMod val="50000"/>
                   </a:schemeClr>
                 </a:solidFill>
-                <a:latin typeface="Open Sans"/>
-                <a:ea typeface="Open Sans"/>
-                <a:cs typeface="Open Sans"/>
               </a:defRPr>
             </a:lvl1pPr>
             <a:lvl2pPr>
@@ -2529,9 +2399,6 @@
                     <a:lumMod val="50000"/>
                   </a:schemeClr>
                 </a:solidFill>
-                <a:latin typeface="Open Sans"/>
-                <a:ea typeface="Open Sans"/>
-                <a:cs typeface="Open Sans"/>
               </a:defRPr>
             </a:lvl2pPr>
             <a:lvl3pPr>
@@ -2541,9 +2408,6 @@
                     <a:lumMod val="50000"/>
                   </a:schemeClr>
                 </a:solidFill>
-                <a:latin typeface="Open Sans"/>
-                <a:ea typeface="Open Sans"/>
-                <a:cs typeface="Open Sans"/>
               </a:defRPr>
             </a:lvl3pPr>
             <a:lvl4pPr>
@@ -2553,9 +2417,6 @@
                     <a:lumMod val="50000"/>
                   </a:schemeClr>
                 </a:solidFill>
-                <a:latin typeface="Open Sans"/>
-                <a:ea typeface="Open Sans"/>
-                <a:cs typeface="Open Sans"/>
               </a:defRPr>
             </a:lvl4pPr>
             <a:lvl5pPr>
@@ -2565,38 +2426,19 @@
                     <a:lumMod val="50000"/>
                   </a:schemeClr>
                 </a:solidFill>
-                <a:latin typeface="Open Sans"/>
-                <a:ea typeface="Open Sans"/>
-                <a:cs typeface="Open Sans"/>
               </a:defRPr>
             </a:lvl5pPr>
             <a:lvl6pPr>
-              <a:defRPr>
-                <a:latin typeface="Open Sans"/>
-                <a:ea typeface="Open Sans"/>
-                <a:cs typeface="Open Sans"/>
-              </a:defRPr>
+              <a:defRPr/>
             </a:lvl6pPr>
             <a:lvl7pPr>
-              <a:defRPr>
-                <a:latin typeface="Open Sans"/>
-                <a:ea typeface="Open Sans"/>
-                <a:cs typeface="Open Sans"/>
-              </a:defRPr>
+              <a:defRPr/>
             </a:lvl7pPr>
             <a:lvl8pPr>
-              <a:defRPr>
-                <a:latin typeface="Open Sans"/>
-                <a:ea typeface="Open Sans"/>
-                <a:cs typeface="Open Sans"/>
-              </a:defRPr>
+              <a:defRPr/>
             </a:lvl8pPr>
             <a:lvl9pPr>
-              <a:defRPr>
-                <a:latin typeface="Open Sans"/>
-                <a:ea typeface="Open Sans"/>
-                <a:cs typeface="Open Sans"/>
-              </a:defRPr>
+              <a:defRPr/>
             </a:lvl9pPr>
           </a:lstStyle>
           <a:p>
@@ -2787,9 +2629,6 @@
                 <a:solidFill>
                   <a:schemeClr val="bg1"/>
                 </a:solidFill>
-                <a:latin typeface="Open Sans"/>
-                <a:ea typeface="Open Sans"/>
-                <a:cs typeface="Open Sans"/>
               </a:defRPr>
             </a:lvl1pPr>
           </a:lstStyle>
@@ -2830,9 +2669,6 @@
                 <a:solidFill>
                   <a:schemeClr val="bg1"/>
                 </a:solidFill>
-                <a:latin typeface="Open Sans"/>
-                <a:ea typeface="Open Sans"/>
-                <a:cs typeface="Open Sans"/>
               </a:defRPr>
             </a:lvl1pPr>
             <a:lvl2pPr marL="457200" indent="0">
@@ -3029,9 +2865,6 @@
                 <a:solidFill>
                   <a:schemeClr val="bg1"/>
                 </a:solidFill>
-                <a:latin typeface="Open Sans"/>
-                <a:ea typeface="Open Sans"/>
-                <a:cs typeface="Open Sans"/>
               </a:defRPr>
             </a:lvl1pPr>
           </a:lstStyle>
@@ -3071,9 +2904,6 @@
                 <a:solidFill>
                   <a:schemeClr val="bg1"/>
                 </a:solidFill>
-                <a:latin typeface="Open Sans"/>
-                <a:ea typeface="Open Sans"/>
-                <a:cs typeface="Open Sans"/>
               </a:defRPr>
             </a:lvl1pPr>
             <a:lvl2pPr>
@@ -3081,9 +2911,6 @@
                 <a:solidFill>
                   <a:schemeClr val="bg1"/>
                 </a:solidFill>
-                <a:latin typeface="Open Sans"/>
-                <a:ea typeface="Open Sans"/>
-                <a:cs typeface="Open Sans"/>
               </a:defRPr>
             </a:lvl2pPr>
             <a:lvl3pPr>
@@ -3091,9 +2918,6 @@
                 <a:solidFill>
                   <a:schemeClr val="bg1"/>
                 </a:solidFill>
-                <a:latin typeface="Open Sans"/>
-                <a:ea typeface="Open Sans"/>
-                <a:cs typeface="Open Sans"/>
               </a:defRPr>
             </a:lvl3pPr>
             <a:lvl4pPr>
@@ -3101,9 +2925,6 @@
                 <a:solidFill>
                   <a:schemeClr val="bg1"/>
                 </a:solidFill>
-                <a:latin typeface="Open Sans"/>
-                <a:ea typeface="Open Sans"/>
-                <a:cs typeface="Open Sans"/>
               </a:defRPr>
             </a:lvl4pPr>
             <a:lvl5pPr>
@@ -3111,9 +2932,6 @@
                 <a:solidFill>
                   <a:schemeClr val="bg1"/>
                 </a:solidFill>
-                <a:latin typeface="Open Sans"/>
-                <a:ea typeface="Open Sans"/>
-                <a:cs typeface="Open Sans"/>
               </a:defRPr>
             </a:lvl5pPr>
           </a:lstStyle>
@@ -4597,9 +4415,6 @@
                 <a:solidFill>
                   <a:schemeClr val="bg1"/>
                 </a:solidFill>
-                <a:latin typeface="Open Sans"/>
-                <a:ea typeface="Open Sans"/>
-                <a:cs typeface="Open Sans"/>
               </a:defRPr>
             </a:lvl1pPr>
           </a:lstStyle>
@@ -4612,9 +4427,6 @@
                 <a:solidFill>
                   <a:schemeClr val="bg1"/>
                 </a:solidFill>
-                <a:latin typeface="Open Sans"/>
-                <a:ea typeface="Open Sans"/>
-                <a:cs typeface="Open Sans"/>
               </a:rPr>
               <a:t>G A L A X Y</a:t>
             </a:r>
@@ -4681,14 +4493,14 @@
     </a:clrScheme>
     <a:fontScheme name="Office Theme">
       <a:majorFont>
-        <a:latin typeface="Arial"/>
-        <a:ea typeface="SimSun"/>
-        <a:cs typeface="Arial"/>
+        <a:latin typeface="Open Sans"/>
+        <a:ea typeface="Microsoft YaHei"/>
+        <a:cs typeface="Open Sans"/>
       </a:majorFont>
       <a:minorFont>
-        <a:latin typeface="Arial"/>
-        <a:ea typeface="SimSun"/>
-        <a:cs typeface="Arial"/>
+        <a:latin typeface="Open Sans"/>
+        <a:ea typeface="Microsoft YaHei"/>
+        <a:cs typeface="Open Sans"/>
       </a:minorFont>
     </a:fontScheme>
     <a:fmtScheme name="Office Theme">
@@ -4930,14 +4742,14 @@
     </a:clrScheme>
     <a:fontScheme name="Arial">
       <a:majorFont>
-        <a:latin typeface="Arial"/>
-        <a:ea typeface="Arial"/>
-        <a:cs typeface="Arial"/>
+        <a:latin typeface="Open Sans"/>
+        <a:ea typeface="Microsoft YaHei"/>
+        <a:cs typeface="Open Sans"/>
       </a:majorFont>
       <a:minorFont>
-        <a:latin typeface="Arial"/>
-        <a:ea typeface="Arial"/>
-        <a:cs typeface="Arial"/>
+        <a:latin typeface="Open Sans"/>
+        <a:ea typeface="Microsoft YaHei"/>
+        <a:cs typeface="Open Sans"/>
       </a:minorFont>
     </a:fontScheme>
     <a:fmtScheme name="Office">

--- a/slide/themes/src/19_galaxy.pptx
+++ b/slide/themes/src/19_galaxy.pptx
@@ -1,14 +1,14 @@
 
 <file path=ppt/presentation.xml><?xml version="1.0" encoding="utf-8"?>
-<p:presentation xmlns:a="http://schemas.openxmlformats.org/drawingml/2006/main" xmlns:r="http://schemas.openxmlformats.org/officeDocument/2006/relationships" xmlns:p="http://schemas.openxmlformats.org/presentationml/2006/main" xmlns:m="http://schemas.openxmlformats.org/officeDocument/2006/math" xmlns:w="http://schemas.openxmlformats.org/wordprocessingml/2006/main" saveSubsetFonts="1">
+<p:presentation xmlns:a="http://schemas.openxmlformats.org/drawingml/2006/main" xmlns:r="http://schemas.openxmlformats.org/officeDocument/2006/relationships" xmlns:p="http://schemas.openxmlformats.org/presentationml/2006/main" saveSubsetFonts="1">
   <p:sldMasterIdLst>
     <p:sldMasterId id="2147483648" r:id="rId1"/>
   </p:sldMasterIdLst>
   <p:notesMasterIdLst>
-    <p:notesMasterId r:id="rId9"/>
+    <p:notesMasterId r:id="rId3"/>
   </p:notesMasterIdLst>
   <p:sldIdLst>
-    <p:sldId id="256" r:id="rId4"/>
+    <p:sldId id="256" r:id="rId2"/>
   </p:sldIdLst>
   <p:sldSz cx="12192000" cy="6858000"/>
   <p:notesSz cx="6858000" cy="9144000"/>
@@ -107,12 +107,38 @@
       </a:defRPr>
     </a:lvl9pPr>
   </p:defaultTextStyle>
+  <p:extLst>
+    <p:ext uri="{EFAFB233-063F-42B5-8137-9DF3F51BA10A}">
+      <p15:sldGuideLst xmlns:p15="http://schemas.microsoft.com/office/powerpoint/2012/main">
+        <p15:guide id="1" pos="377">
+          <p15:clr>
+            <a:srgbClr val="A4A3A4"/>
+          </p15:clr>
+        </p15:guide>
+        <p15:guide id="2" orient="horz" pos="2160">
+          <p15:clr>
+            <a:srgbClr val="A4A3A4"/>
+          </p15:clr>
+        </p15:guide>
+        <p15:guide id="3" pos="3901">
+          <p15:clr>
+            <a:srgbClr val="A4A3A4"/>
+          </p15:clr>
+        </p15:guide>
+        <p15:guide id="4" pos="7274">
+          <p15:clr>
+            <a:srgbClr val="A4A3A4"/>
+          </p15:clr>
+        </p15:guide>
+      </p15:sldGuideLst>
+    </p:ext>
+  </p:extLst>
 </p:presentation>
 </file>
 
 <file path=ppt/notesMasters/notesMaster1.xml><?xml version="1.0" encoding="utf-8"?>
 <p:notesMaster xmlns:a="http://schemas.openxmlformats.org/drawingml/2006/main" xmlns:r="http://schemas.openxmlformats.org/officeDocument/2006/relationships" xmlns:p="http://schemas.openxmlformats.org/presentationml/2006/main">
-  <p:cSld name="">
+  <p:cSld>
     <p:bg>
       <p:bgRef idx="1001">
         <a:schemeClr val="bg1"/>
@@ -198,7 +224,7 @@
             </a:pPr>
             <a:fld id="{3632E96E-41F7-40C5-8419-297958CC00FA}" type="datetimeFigureOut">
               <a:rPr lang="en-US"/>
-              <a:t>10/30/2013</a:t>
+              <a:t>4/5/2026</a:t>
             </a:fld>
             <a:endParaRPr lang="en-US"/>
           </a:p>
@@ -208,7 +234,7 @@
         <p:nvSpPr>
           <p:cNvPr id="956430791" name="Slide Image Placeholder 3"/>
           <p:cNvSpPr>
-            <a:spLocks noChangeAspect="1" noGrp="1" noRot="1"/>
+            <a:spLocks noGrp="1" noRot="1" noChangeAspect="1"/>
           </p:cNvSpPr>
           <p:nvPr>
             <p:ph type="sldImg" idx="2"/>
@@ -310,7 +336,6 @@
               <a:rPr lang="en-US"/>
               <a:t>Fifth level</a:t>
             </a:r>
-            <a:endParaRPr lang="en-US"/>
           </a:p>
         </p:txBody>
       </p:sp>
@@ -485,8 +510,8 @@
 </file>
 
 <file path=ppt/notesSlides/notesSlide1.xml><?xml version="1.0" encoding="utf-8"?>
-<p:notes xmlns:a="http://schemas.openxmlformats.org/drawingml/2006/main" xmlns:r="http://schemas.openxmlformats.org/officeDocument/2006/relationships" xmlns:p="http://schemas.openxmlformats.org/presentationml/2006/main" xmlns:m="http://schemas.openxmlformats.org/officeDocument/2006/math" xmlns:w="http://schemas.openxmlformats.org/wordprocessingml/2006/main">
-  <p:cSld name="">
+<p:notes xmlns:a="http://schemas.openxmlformats.org/drawingml/2006/main" xmlns:r="http://schemas.openxmlformats.org/officeDocument/2006/relationships" xmlns:p="http://schemas.openxmlformats.org/presentationml/2006/main">
+  <p:cSld>
     <p:spTree>
       <p:nvGrpSpPr>
         <p:cNvPr id="1" name=""/>
@@ -505,7 +530,7 @@
         <p:nvSpPr>
           <p:cNvPr id="1216365523" name="Slide Image Placeholder 1"/>
           <p:cNvSpPr>
-            <a:spLocks noChangeAspect="1" noGrp="1" noRot="1"/>
+            <a:spLocks noGrp="1" noRot="1" noChangeAspect="1"/>
           </p:cNvSpPr>
           <p:nvPr>
             <p:ph type="sldImg"/>
@@ -555,7 +580,7 @@
             </a:pPr>
             <a:fld id="{16F9F309-941F-13D4-3903-ADF1D86B8C3D}" type="slidenum">
               <a:rPr/>
-              <a:t/>
+              <a:t>1</a:t>
             </a:fld>
             <a:endParaRPr/>
           </a:p>
@@ -570,14 +595,15 @@
 </file>
 
 <file path=ppt/slideLayouts/slideLayout1.xml><?xml version="1.0" encoding="utf-8"?>
-<p:sldLayout xmlns:a="http://schemas.openxmlformats.org/drawingml/2006/main" xmlns:r="http://schemas.openxmlformats.org/officeDocument/2006/relationships" xmlns:p="http://schemas.openxmlformats.org/presentationml/2006/main" xmlns:m="http://schemas.openxmlformats.org/officeDocument/2006/math" xmlns:w="http://schemas.openxmlformats.org/wordprocessingml/2006/main" matchingName="" preserve="1" showMasterPhAnim="0" showMasterSp="1" type="title" userDrawn="1">
+<p:sldLayout xmlns:a="http://schemas.openxmlformats.org/drawingml/2006/main" xmlns:r="http://schemas.openxmlformats.org/officeDocument/2006/relationships" xmlns:p="http://schemas.openxmlformats.org/presentationml/2006/main" showMasterPhAnim="0" type="title" preserve="1" userDrawn="1">
   <p:cSld name="Title Slide">
     <p:bg>
-      <p:bgPr shadeToTitle="0">
+      <p:bgPr>
         <a:blipFill rotWithShape="1">
           <a:blip r:embed="rId2"/>
           <a:stretch/>
         </a:blipFill>
+        <a:effectLst/>
       </p:bgPr>
     </p:bg>
     <p:spTree>
@@ -614,7 +640,7 @@
             </a:pPr>
             <a:fld id="{BBC0CDAB-20E9-A5E2-2D0C-C2304C61B79D}" type="datetimeFigureOut">
               <a:rPr lang="en-US"/>
-              <a:t/>
+              <a:t>4/5/2026</a:t>
             </a:fld>
             <a:endParaRPr lang="en-US"/>
           </a:p>
@@ -662,7 +688,7 @@
             </a:pPr>
             <a:fld id="{CFDD8B50-25EE-CA57-8216-109084AE6980}" type="slidenum">
               <a:rPr lang="en-US"/>
-              <a:t/>
+              <a:t>‹#›</a:t>
             </a:fld>
             <a:endParaRPr lang="en-US"/>
           </a:p>
@@ -679,7 +705,7 @@
           </p:nvPr>
         </p:nvSpPr>
         <p:spPr bwMode="auto">
-          <a:xfrm flipH="0" flipV="0">
+          <a:xfrm>
             <a:off x="1716666" y="2095499"/>
             <a:ext cx="8762999" cy="2053166"/>
           </a:xfrm>
@@ -722,7 +748,7 @@
           </p:nvPr>
         </p:nvSpPr>
         <p:spPr bwMode="auto">
-          <a:xfrm flipH="0" flipV="0">
+          <a:xfrm>
             <a:off x="1716666" y="4148665"/>
             <a:ext cx="8762999" cy="2053166"/>
           </a:xfrm>
@@ -747,7 +773,6 @@
               <a:rPr lang="en-US"/>
               <a:t>Click to edit Master subtitle style</a:t>
             </a:r>
-            <a:endParaRPr lang="en-US"/>
           </a:p>
         </p:txBody>
       </p:sp>
@@ -760,7 +785,7 @@
 </file>
 
 <file path=ppt/slideLayouts/slideLayout10.xml><?xml version="1.0" encoding="utf-8"?>
-<p:sldLayout xmlns:a="http://schemas.openxmlformats.org/drawingml/2006/main" xmlns:r="http://schemas.openxmlformats.org/officeDocument/2006/relationships" xmlns:p="http://schemas.openxmlformats.org/presentationml/2006/main" xmlns:m="http://schemas.openxmlformats.org/officeDocument/2006/math" xmlns:w="http://schemas.openxmlformats.org/wordprocessingml/2006/main" matchingName="" preserve="1" showMasterPhAnim="0" showMasterSp="1" type="vertTx" userDrawn="1">
+<p:sldLayout xmlns:a="http://schemas.openxmlformats.org/drawingml/2006/main" xmlns:r="http://schemas.openxmlformats.org/officeDocument/2006/relationships" xmlns:p="http://schemas.openxmlformats.org/presentationml/2006/main" showMasterPhAnim="0" type="vertTx" preserve="1" userDrawn="1">
   <p:cSld name="Title and Vertical Text">
     <p:spTree>
       <p:nvGrpSpPr>
@@ -798,7 +823,6 @@
               <a:rPr lang="en-US"/>
               <a:t>Click to edit Master title style</a:t>
             </a:r>
-            <a:endParaRPr lang="en-US"/>
           </a:p>
         </p:txBody>
       </p:sp>
@@ -864,7 +888,6 @@
               <a:rPr lang="en-US"/>
               <a:t>Fifth level</a:t>
             </a:r>
-            <a:endParaRPr lang="en-US"/>
           </a:p>
         </p:txBody>
       </p:sp>
@@ -888,7 +911,7 @@
             </a:pPr>
             <a:fld id="{BCC18F51-09EC-435C-A3BA-64A766E099C0}" type="datetimeFigureOut">
               <a:rPr lang="en-US"/>
-              <a:t>19/12/2025</a:t>
+              <a:t>4/5/2026</a:t>
             </a:fld>
             <a:endParaRPr lang="en-US"/>
           </a:p>
@@ -936,7 +959,7 @@
             </a:pPr>
             <a:fld id="{08395586-F03A-48D1-94DF-16B239DF4FB5}" type="slidenum">
               <a:rPr lang="en-US"/>
-              <a:t>&lt;#&gt;</a:t>
+              <a:t>‹#›</a:t>
             </a:fld>
             <a:endParaRPr lang="en-US"/>
           </a:p>
@@ -951,7 +974,7 @@
 </file>
 
 <file path=ppt/slideLayouts/slideLayout11.xml><?xml version="1.0" encoding="utf-8"?>
-<p:sldLayout xmlns:a="http://schemas.openxmlformats.org/drawingml/2006/main" xmlns:r="http://schemas.openxmlformats.org/officeDocument/2006/relationships" xmlns:p="http://schemas.openxmlformats.org/presentationml/2006/main" xmlns:m="http://schemas.openxmlformats.org/officeDocument/2006/math" xmlns:w="http://schemas.openxmlformats.org/wordprocessingml/2006/main" matchingName="" preserve="1" showMasterPhAnim="0" showMasterSp="1" type="vertTitleAndTx" userDrawn="1">
+<p:sldLayout xmlns:a="http://schemas.openxmlformats.org/drawingml/2006/main" xmlns:r="http://schemas.openxmlformats.org/officeDocument/2006/relationships" xmlns:p="http://schemas.openxmlformats.org/presentationml/2006/main" showMasterPhAnim="0" type="vertTitleAndTx" preserve="1" userDrawn="1">
   <p:cSld name="Vertical Title and Text">
     <p:spTree>
       <p:nvGrpSpPr>
@@ -994,7 +1017,6 @@
               <a:rPr lang="en-US"/>
               <a:t>Click to edit Master title style</a:t>
             </a:r>
-            <a:endParaRPr lang="en-US"/>
           </a:p>
         </p:txBody>
       </p:sp>
@@ -1065,7 +1087,6 @@
               <a:rPr lang="en-US"/>
               <a:t>Fifth level</a:t>
             </a:r>
-            <a:endParaRPr lang="en-US"/>
           </a:p>
         </p:txBody>
       </p:sp>
@@ -1089,7 +1110,7 @@
             </a:pPr>
             <a:fld id="{BCC18F51-09EC-435C-A3BA-64A766E099C0}" type="datetimeFigureOut">
               <a:rPr lang="en-US"/>
-              <a:t>19/12/2025</a:t>
+              <a:t>4/5/2026</a:t>
             </a:fld>
             <a:endParaRPr lang="en-US"/>
           </a:p>
@@ -1137,7 +1158,7 @@
             </a:pPr>
             <a:fld id="{08395586-F03A-48D1-94DF-16B239DF4FB5}" type="slidenum">
               <a:rPr lang="en-US"/>
-              <a:t>&lt;#&gt;</a:t>
+              <a:t>‹#›</a:t>
             </a:fld>
             <a:endParaRPr lang="en-US"/>
           </a:p>
@@ -1152,14 +1173,15 @@
 </file>
 
 <file path=ppt/slideLayouts/slideLayout2.xml><?xml version="1.0" encoding="utf-8"?>
-<p:sldLayout xmlns:a="http://schemas.openxmlformats.org/drawingml/2006/main" xmlns:r="http://schemas.openxmlformats.org/officeDocument/2006/relationships" xmlns:p="http://schemas.openxmlformats.org/presentationml/2006/main" xmlns:m="http://schemas.openxmlformats.org/officeDocument/2006/math" xmlns:w="http://schemas.openxmlformats.org/wordprocessingml/2006/main" matchingName="" preserve="1" showMasterPhAnim="0" showMasterSp="1" type="obj" userDrawn="1">
+<p:sldLayout xmlns:a="http://schemas.openxmlformats.org/drawingml/2006/main" xmlns:r="http://schemas.openxmlformats.org/officeDocument/2006/relationships" xmlns:p="http://schemas.openxmlformats.org/presentationml/2006/main" showMasterPhAnim="0" type="obj" preserve="1" userDrawn="1">
   <p:cSld name="Title and Content">
     <p:bg>
-      <p:bgPr shadeToTitle="0">
+      <p:bgPr>
         <a:blipFill rotWithShape="1">
           <a:blip r:embed="rId2"/>
           <a:stretch/>
         </a:blipFill>
+        <a:effectLst/>
       </p:bgPr>
     </p:bg>
     <p:spTree>
@@ -1187,7 +1209,7 @@
           </p:nvPr>
         </p:nvSpPr>
         <p:spPr bwMode="auto">
-          <a:xfrm flipH="0" flipV="0">
+          <a:xfrm>
             <a:off x="838198" y="767686"/>
             <a:ext cx="10515600" cy="923001"/>
           </a:xfrm>
@@ -1211,7 +1233,6 @@
               <a:rPr lang="en-US"/>
               <a:t>Click to edit Master title style</a:t>
             </a:r>
-            <a:endParaRPr lang="en-US"/>
           </a:p>
         </p:txBody>
       </p:sp>
@@ -1226,7 +1247,7 @@
           </p:nvPr>
         </p:nvSpPr>
         <p:spPr bwMode="auto">
-          <a:xfrm flipH="0" flipV="0">
+          <a:xfrm>
             <a:off x="838199" y="1825624"/>
             <a:ext cx="10515600" cy="4283512"/>
           </a:xfrm>
@@ -1318,7 +1339,6 @@
               <a:rPr lang="en-US"/>
               <a:t>Fifth level</a:t>
             </a:r>
-            <a:endParaRPr lang="en-US"/>
           </a:p>
         </p:txBody>
       </p:sp>
@@ -1342,7 +1362,7 @@
             </a:pPr>
             <a:fld id="{BCC18F51-09EC-435C-A3BA-64A766E099C0}" type="datetimeFigureOut">
               <a:rPr lang="en-US"/>
-              <a:t>19/12/2025</a:t>
+              <a:t>4/5/2026</a:t>
             </a:fld>
             <a:endParaRPr lang="en-US"/>
           </a:p>
@@ -1390,7 +1410,7 @@
             </a:pPr>
             <a:fld id="{08395586-F03A-48D1-94DF-16B239DF4FB5}" type="slidenum">
               <a:rPr lang="en-US"/>
-              <a:t>3</a:t>
+              <a:t>‹#›</a:t>
             </a:fld>
             <a:endParaRPr lang="en-US"/>
           </a:p>
@@ -1405,14 +1425,15 @@
 </file>
 
 <file path=ppt/slideLayouts/slideLayout3.xml><?xml version="1.0" encoding="utf-8"?>
-<p:sldLayout xmlns:a="http://schemas.openxmlformats.org/drawingml/2006/main" xmlns:r="http://schemas.openxmlformats.org/officeDocument/2006/relationships" xmlns:p="http://schemas.openxmlformats.org/presentationml/2006/main" xmlns:m="http://schemas.openxmlformats.org/officeDocument/2006/math" xmlns:w="http://schemas.openxmlformats.org/wordprocessingml/2006/main" matchingName="" preserve="1" showMasterPhAnim="0" showMasterSp="1" type="secHead" userDrawn="1">
+<p:sldLayout xmlns:a="http://schemas.openxmlformats.org/drawingml/2006/main" xmlns:r="http://schemas.openxmlformats.org/officeDocument/2006/relationships" xmlns:p="http://schemas.openxmlformats.org/presentationml/2006/main" showMasterPhAnim="0" type="secHead" preserve="1" userDrawn="1">
   <p:cSld name="Section Header">
     <p:bg>
-      <p:bgPr shadeToTitle="0">
+      <p:bgPr>
         <a:blipFill rotWithShape="1">
           <a:blip r:embed="rId2"/>
           <a:stretch/>
         </a:blipFill>
+        <a:effectLst/>
       </p:bgPr>
     </p:bg>
     <p:spTree>
@@ -1440,13 +1461,13 @@
           </p:nvPr>
         </p:nvSpPr>
         <p:spPr bwMode="auto">
-          <a:xfrm flipH="0" flipV="0">
+          <a:xfrm>
             <a:off x="838198" y="828320"/>
             <a:ext cx="10515600" cy="3692500"/>
           </a:xfrm>
         </p:spPr>
         <p:txBody>
-          <a:bodyPr vertOverflow="overflow" horzOverflow="overflow" vert="horz" wrap="square" lIns="91440" tIns="45720" rIns="91440" bIns="45720" numCol="1" spcCol="0" rtlCol="0" fromWordArt="0" anchor="ctr" anchorCtr="0" forceAA="0" upright="0" compatLnSpc="0">
+          <a:bodyPr vertOverflow="overflow" horzOverflow="overflow" vert="horz" wrap="square" lIns="91440" tIns="45720" rIns="91440" bIns="45720" numCol="1" spcCol="0" rtlCol="0" fromWordArt="0" anchor="ctr" anchorCtr="0" forceAA="0" compatLnSpc="0">
             <a:normAutofit/>
           </a:bodyPr>
           <a:lstStyle>
@@ -1469,7 +1490,6 @@
               <a:rPr lang="en-US"/>
               <a:t>Click to edit Master title style</a:t>
             </a:r>
-            <a:endParaRPr lang="en-US"/>
           </a:p>
         </p:txBody>
       </p:sp>
@@ -1613,7 +1633,7 @@
             </a:pPr>
             <a:fld id="{BCC18F51-09EC-435C-A3BA-64A766E099C0}" type="datetimeFigureOut">
               <a:rPr lang="en-US"/>
-              <a:t>19/12/2025</a:t>
+              <a:t>4/5/2026</a:t>
             </a:fld>
             <a:endParaRPr lang="en-US"/>
           </a:p>
@@ -1661,7 +1681,7 @@
             </a:pPr>
             <a:fld id="{08395586-F03A-48D1-94DF-16B239DF4FB5}" type="slidenum">
               <a:rPr lang="en-US"/>
-              <a:t>&lt;#&gt;</a:t>
+              <a:t>‹#›</a:t>
             </a:fld>
             <a:endParaRPr lang="en-US"/>
           </a:p>
@@ -1676,14 +1696,15 @@
 </file>
 
 <file path=ppt/slideLayouts/slideLayout4.xml><?xml version="1.0" encoding="utf-8"?>
-<p:sldLayout xmlns:a="http://schemas.openxmlformats.org/drawingml/2006/main" xmlns:r="http://schemas.openxmlformats.org/officeDocument/2006/relationships" xmlns:p="http://schemas.openxmlformats.org/presentationml/2006/main" xmlns:m="http://schemas.openxmlformats.org/officeDocument/2006/math" xmlns:w="http://schemas.openxmlformats.org/wordprocessingml/2006/main" matchingName="" preserve="1" showMasterPhAnim="0" showMasterSp="1" type="twoObj" userDrawn="1">
+<p:sldLayout xmlns:a="http://schemas.openxmlformats.org/drawingml/2006/main" xmlns:r="http://schemas.openxmlformats.org/officeDocument/2006/relationships" xmlns:p="http://schemas.openxmlformats.org/presentationml/2006/main" showMasterPhAnim="0" type="twoObj" preserve="1" userDrawn="1">
   <p:cSld name="Two Content">
     <p:bg>
-      <p:bgPr shadeToTitle="0">
+      <p:bgPr>
         <a:blipFill rotWithShape="1">
           <a:blip r:embed="rId2"/>
           <a:stretch/>
         </a:blipFill>
+        <a:effectLst/>
       </p:bgPr>
     </p:bg>
     <p:spTree>
@@ -1711,13 +1732,13 @@
           </p:nvPr>
         </p:nvSpPr>
         <p:spPr bwMode="auto">
-          <a:xfrm flipH="0" flipV="0">
+          <a:xfrm>
             <a:off x="6172200" y="796118"/>
             <a:ext cx="5181598" cy="766620"/>
           </a:xfrm>
         </p:spPr>
         <p:txBody>
-          <a:bodyPr vertOverflow="overflow" horzOverflow="overflow" vert="horz" wrap="square" lIns="91440" tIns="45720" rIns="91440" bIns="45720" numCol="1" spcCol="0" rtlCol="0" fromWordArt="0" anchor="ctr" anchorCtr="0" forceAA="0" upright="0" compatLnSpc="0">
+          <a:bodyPr vertOverflow="overflow" horzOverflow="overflow" vert="horz" wrap="square" lIns="91440" tIns="45720" rIns="91440" bIns="45720" numCol="1" spcCol="0" rtlCol="0" fromWordArt="0" anchor="ctr" anchorCtr="0" forceAA="0" compatLnSpc="0">
             <a:normAutofit/>
           </a:bodyPr>
           <a:lstStyle>
@@ -1763,7 +1784,6 @@
               <a:rPr lang="en-US"/>
               <a:t>Click to edit Master title style</a:t>
             </a:r>
-            <a:endParaRPr lang="en-US"/>
           </a:p>
         </p:txBody>
       </p:sp>
@@ -1778,7 +1798,7 @@
           </p:nvPr>
         </p:nvSpPr>
         <p:spPr bwMode="auto">
-          <a:xfrm flipH="0" flipV="0">
+          <a:xfrm>
             <a:off x="6172200" y="1562739"/>
             <a:ext cx="5181598" cy="4546397"/>
           </a:xfrm>
@@ -1892,7 +1912,6 @@
               <a:rPr lang="en-US"/>
               <a:t>Fifth level</a:t>
             </a:r>
-            <a:endParaRPr lang="en-US"/>
           </a:p>
         </p:txBody>
       </p:sp>
@@ -1916,7 +1935,7 @@
             </a:pPr>
             <a:fld id="{BCC18F51-09EC-435C-A3BA-64A766E099C0}" type="datetimeFigureOut">
               <a:rPr lang="en-US"/>
-              <a:t>19/12/2025</a:t>
+              <a:t>4/5/2026</a:t>
             </a:fld>
             <a:endParaRPr lang="en-US"/>
           </a:p>
@@ -1992,7 +2011,7 @@
             </a:pPr>
             <a:fld id="{08395586-F03A-48D1-94DF-16B239DF4FB5}" type="slidenum">
               <a:rPr lang="en-US"/>
-              <a:t>&lt;#&gt;</a:t>
+              <a:t>‹#›</a:t>
             </a:fld>
             <a:endParaRPr lang="en-US"/>
           </a:p>
@@ -2007,14 +2026,15 @@
 </file>
 
 <file path=ppt/slideLayouts/slideLayout5.xml><?xml version="1.0" encoding="utf-8"?>
-<p:sldLayout xmlns:a="http://schemas.openxmlformats.org/drawingml/2006/main" xmlns:r="http://schemas.openxmlformats.org/officeDocument/2006/relationships" xmlns:p="http://schemas.openxmlformats.org/presentationml/2006/main" xmlns:m="http://schemas.openxmlformats.org/officeDocument/2006/math" xmlns:w="http://schemas.openxmlformats.org/wordprocessingml/2006/main" matchingName="" preserve="1" showMasterPhAnim="0" showMasterSp="1" type="twoTxTwoObj" userDrawn="1">
+<p:sldLayout xmlns:a="http://schemas.openxmlformats.org/drawingml/2006/main" xmlns:r="http://schemas.openxmlformats.org/officeDocument/2006/relationships" xmlns:p="http://schemas.openxmlformats.org/presentationml/2006/main" showMasterPhAnim="0" type="twoTxTwoObj" preserve="1" userDrawn="1">
   <p:cSld name="Comparison">
     <p:bg>
-      <p:bgPr shadeToTitle="0">
+      <p:bgPr>
         <a:blipFill rotWithShape="1">
           <a:blip r:embed="rId2"/>
           <a:stretch/>
         </a:blipFill>
+        <a:effectLst/>
       </p:bgPr>
     </p:bg>
     <p:spTree>
@@ -2115,7 +2135,7 @@
             </a:pPr>
             <a:fld id="{BCC18F51-09EC-435C-A3BA-64A766E099C0}" type="datetimeFigureOut">
               <a:rPr lang="en-US"/>
-              <a:t>19/12/2025</a:t>
+              <a:t>4/5/2026</a:t>
             </a:fld>
             <a:endParaRPr lang="en-US"/>
           </a:p>
@@ -2291,7 +2311,7 @@
             </a:pPr>
             <a:fld id="{08395586-F03A-48D1-94DF-16B239DF4FB5}" type="slidenum">
               <a:rPr lang="en-US"/>
-              <a:t>&lt;#&gt;</a:t>
+              <a:t>‹#›</a:t>
             </a:fld>
             <a:endParaRPr lang="en-US"/>
           </a:p>
@@ -2308,13 +2328,13 @@
           </p:nvPr>
         </p:nvSpPr>
         <p:spPr bwMode="auto">
-          <a:xfrm flipH="0" flipV="0">
+          <a:xfrm>
             <a:off x="761998" y="796118"/>
             <a:ext cx="5257800" cy="766620"/>
           </a:xfrm>
         </p:spPr>
         <p:txBody>
-          <a:bodyPr vertOverflow="overflow" horzOverflow="overflow" vert="horz" wrap="square" lIns="91440" tIns="45720" rIns="91440" bIns="45720" numCol="1" spcCol="0" rtlCol="0" fromWordArt="0" anchor="ctr" anchorCtr="0" forceAA="0" upright="0" compatLnSpc="0">
+          <a:bodyPr vertOverflow="overflow" horzOverflow="overflow" vert="horz" wrap="square" lIns="91440" tIns="45720" rIns="91440" bIns="45720" numCol="1" spcCol="0" rtlCol="0" fromWordArt="0" anchor="ctr" anchorCtr="0" forceAA="0" compatLnSpc="0">
             <a:normAutofit fontScale="90000" lnSpcReduction="2000"/>
           </a:bodyPr>
           <a:lstStyle>
@@ -2360,7 +2380,6 @@
               <a:rPr lang="en-US"/>
               <a:t>Click to edit Master title style</a:t>
             </a:r>
-            <a:endParaRPr lang="en-US"/>
           </a:p>
         </p:txBody>
       </p:sp>
@@ -2375,7 +2394,7 @@
           </p:nvPr>
         </p:nvSpPr>
         <p:spPr bwMode="auto">
-          <a:xfrm flipH="0" flipV="0">
+          <a:xfrm>
             <a:off x="838198" y="1562739"/>
             <a:ext cx="5181598" cy="4614221"/>
           </a:xfrm>
@@ -2489,7 +2508,6 @@
               <a:rPr lang="en-US"/>
               <a:t>Fifth level</a:t>
             </a:r>
-            <a:endParaRPr lang="en-US"/>
           </a:p>
         </p:txBody>
       </p:sp>
@@ -2502,14 +2520,15 @@
 </file>
 
 <file path=ppt/slideLayouts/slideLayout6.xml><?xml version="1.0" encoding="utf-8"?>
-<p:sldLayout xmlns:a="http://schemas.openxmlformats.org/drawingml/2006/main" xmlns:r="http://schemas.openxmlformats.org/officeDocument/2006/relationships" xmlns:p="http://schemas.openxmlformats.org/presentationml/2006/main" xmlns:m="http://schemas.openxmlformats.org/officeDocument/2006/math" xmlns:w="http://schemas.openxmlformats.org/wordprocessingml/2006/main" matchingName="" preserve="1" showMasterPhAnim="0" showMasterSp="1" type="blank" userDrawn="1">
+<p:sldLayout xmlns:a="http://schemas.openxmlformats.org/drawingml/2006/main" xmlns:r="http://schemas.openxmlformats.org/officeDocument/2006/relationships" xmlns:p="http://schemas.openxmlformats.org/presentationml/2006/main" showMasterPhAnim="0" type="blank" preserve="1" userDrawn="1">
   <p:cSld name="Blank">
     <p:bg>
-      <p:bgPr shadeToTitle="0">
+      <p:bgPr>
         <a:blipFill rotWithShape="1">
           <a:blip r:embed="rId2"/>
           <a:stretch/>
         </a:blipFill>
+        <a:effectLst/>
       </p:bgPr>
     </p:bg>
     <p:spTree>
@@ -2546,7 +2565,7 @@
             </a:pPr>
             <a:fld id="{BCC18F51-09EC-435C-A3BA-64A766E099C0}" type="datetimeFigureOut">
               <a:rPr lang="en-US"/>
-              <a:t>19/12/2025</a:t>
+              <a:t>4/5/2026</a:t>
             </a:fld>
             <a:endParaRPr lang="en-US"/>
           </a:p>
@@ -2594,7 +2613,7 @@
             </a:pPr>
             <a:fld id="{08395586-F03A-48D1-94DF-16B239DF4FB5}" type="slidenum">
               <a:rPr lang="en-US"/>
-              <a:t>&lt;#&gt;</a:t>
+              <a:t>‹#›</a:t>
             </a:fld>
             <a:endParaRPr lang="en-US"/>
           </a:p>
@@ -2611,13 +2630,13 @@
           </p:nvPr>
         </p:nvSpPr>
         <p:spPr bwMode="auto">
-          <a:xfrm flipH="0" flipV="0">
+          <a:xfrm>
             <a:off x="771003" y="767686"/>
             <a:ext cx="10582796" cy="3905533"/>
           </a:xfrm>
         </p:spPr>
         <p:txBody>
-          <a:bodyPr vertOverflow="overflow" horzOverflow="overflow" vert="horz" wrap="square" lIns="91440" tIns="45720" rIns="91440" bIns="45720" numCol="1" spcCol="0" rtlCol="0" fromWordArt="0" anchor="ctr" anchorCtr="0" forceAA="0" upright="0" compatLnSpc="0">
+          <a:bodyPr vertOverflow="overflow" horzOverflow="overflow" vert="horz" wrap="square" lIns="91440" tIns="45720" rIns="91440" bIns="45720" numCol="1" spcCol="0" rtlCol="0" fromWordArt="0" anchor="ctr" anchorCtr="0" forceAA="0" compatLnSpc="0">
             <a:normAutofit/>
           </a:bodyPr>
           <a:lstStyle>
@@ -2640,7 +2659,6 @@
               <a:rPr lang="en-US"/>
               <a:t>Click to edit Master title style</a:t>
             </a:r>
-            <a:endParaRPr lang="en-US"/>
           </a:p>
         </p:txBody>
       </p:sp>
@@ -2655,7 +2673,7 @@
           </p:nvPr>
         </p:nvSpPr>
         <p:spPr bwMode="auto">
-          <a:xfrm flipH="0" flipV="0">
+          <a:xfrm>
             <a:off x="771003" y="4741862"/>
             <a:ext cx="10582796" cy="1314330"/>
           </a:xfrm>
@@ -2773,14 +2791,15 @@
 </file>
 
 <file path=ppt/slideLayouts/slideLayout7.xml><?xml version="1.0" encoding="utf-8"?>
-<p:sldLayout xmlns:a="http://schemas.openxmlformats.org/drawingml/2006/main" xmlns:r="http://schemas.openxmlformats.org/officeDocument/2006/relationships" xmlns:p="http://schemas.openxmlformats.org/presentationml/2006/main" xmlns:m="http://schemas.openxmlformats.org/officeDocument/2006/math" xmlns:w="http://schemas.openxmlformats.org/wordprocessingml/2006/main" matchingName="" preserve="1" showMasterPhAnim="0" showMasterSp="1" type="titleOnly" userDrawn="1">
+<p:sldLayout xmlns:a="http://schemas.openxmlformats.org/drawingml/2006/main" xmlns:r="http://schemas.openxmlformats.org/officeDocument/2006/relationships" xmlns:p="http://schemas.openxmlformats.org/presentationml/2006/main" showMasterPhAnim="0" type="titleOnly" preserve="1" userDrawn="1">
   <p:cSld name="Title Only">
     <p:bg>
-      <p:bgPr shadeToTitle="0">
+      <p:bgPr>
         <a:blipFill rotWithShape="1">
           <a:blip r:embed="rId2"/>
           <a:stretch/>
         </a:blipFill>
+        <a:effectLst/>
       </p:bgPr>
     </p:bg>
     <p:spTree>
@@ -2799,12 +2818,12 @@
       </p:grpSpPr>
       <p:sp>
         <p:nvSpPr>
-          <p:cNvPr id="788739004" name=""/>
+          <p:cNvPr id="788739004" name="Rectangle: Rounded Corners 788739003"/>
           <p:cNvSpPr/>
           <p:nvPr/>
         </p:nvSpPr>
         <p:spPr bwMode="auto">
-          <a:xfrm rot="0" flipH="0" flipV="0">
+          <a:xfrm>
             <a:off x="671915" y="767685"/>
             <a:ext cx="10875558" cy="5388021"/>
           </a:xfrm>
@@ -2852,7 +2871,7 @@
           </p:nvPr>
         </p:nvSpPr>
         <p:spPr bwMode="auto">
-          <a:xfrm flipH="0" flipV="0">
+          <a:xfrm>
             <a:off x="838198" y="767685"/>
             <a:ext cx="10515600" cy="923000"/>
           </a:xfrm>
@@ -2876,7 +2895,6 @@
               <a:rPr lang="en-US"/>
               <a:t>Click to edit Master title style</a:t>
             </a:r>
-            <a:endParaRPr lang="en-US"/>
           </a:p>
         </p:txBody>
       </p:sp>
@@ -2891,7 +2909,7 @@
           </p:nvPr>
         </p:nvSpPr>
         <p:spPr bwMode="auto">
-          <a:xfrm flipH="0" flipV="0">
+          <a:xfrm>
             <a:off x="838197" y="1825623"/>
             <a:ext cx="10515600" cy="4330081"/>
           </a:xfrm>
@@ -2983,7 +3001,6 @@
               <a:rPr lang="en-US"/>
               <a:t>Fifth level</a:t>
             </a:r>
-            <a:endParaRPr lang="en-US"/>
           </a:p>
         </p:txBody>
       </p:sp>
@@ -3012,7 +3029,7 @@
             </a:pPr>
             <a:fld id="{4C769E48-BC7D-895E-B210-0C4ED44A682F}" type="datetimeFigureOut">
               <a:rPr lang="en-US"/>
-              <a:t/>
+              <a:t>4/5/2026</a:t>
             </a:fld>
             <a:endParaRPr lang="en-US"/>
           </a:p>
@@ -3070,7 +3087,7 @@
             </a:pPr>
             <a:fld id="{DA811E7B-9099-821F-CC95-6DB14BFF1DBB}" type="slidenum">
               <a:rPr lang="en-US"/>
-              <a:t/>
+              <a:t>‹#›</a:t>
             </a:fld>
             <a:endParaRPr lang="en-US"/>
           </a:p>
@@ -3085,7 +3102,7 @@
 </file>
 
 <file path=ppt/slideLayouts/slideLayout8.xml><?xml version="1.0" encoding="utf-8"?>
-<p:sldLayout xmlns:a="http://schemas.openxmlformats.org/drawingml/2006/main" xmlns:r="http://schemas.openxmlformats.org/officeDocument/2006/relationships" xmlns:p="http://schemas.openxmlformats.org/presentationml/2006/main" xmlns:m="http://schemas.openxmlformats.org/officeDocument/2006/math" xmlns:w="http://schemas.openxmlformats.org/wordprocessingml/2006/main" matchingName="" preserve="1" showMasterPhAnim="0" showMasterSp="1" type="objTx" userDrawn="1">
+<p:sldLayout xmlns:a="http://schemas.openxmlformats.org/drawingml/2006/main" xmlns:r="http://schemas.openxmlformats.org/officeDocument/2006/relationships" xmlns:p="http://schemas.openxmlformats.org/presentationml/2006/main" showMasterPhAnim="0" type="objTx" preserve="1" userDrawn="1">
   <p:cSld name="Content with Caption">
     <p:spTree>
       <p:nvGrpSpPr>
@@ -3132,7 +3149,6 @@
               <a:rPr lang="en-US"/>
               <a:t>Click to edit Master title style</a:t>
             </a:r>
-            <a:endParaRPr lang="en-US"/>
           </a:p>
         </p:txBody>
       </p:sp>
@@ -3147,7 +3163,7 @@
           </p:nvPr>
         </p:nvSpPr>
         <p:spPr bwMode="auto">
-          <a:xfrm flipH="0" flipV="0">
+          <a:xfrm>
             <a:off x="5183187" y="457199"/>
             <a:ext cx="6172200" cy="5403849"/>
           </a:xfrm>
@@ -3231,7 +3247,6 @@
               <a:rPr lang="en-US"/>
               <a:t>Fifth level</a:t>
             </a:r>
-            <a:endParaRPr lang="en-US"/>
           </a:p>
         </p:txBody>
       </p:sp>
@@ -3323,7 +3338,7 @@
             </a:pPr>
             <a:fld id="{BCC18F51-09EC-435C-A3BA-64A766E099C0}" type="datetimeFigureOut">
               <a:rPr lang="en-US"/>
-              <a:t>19/12/2025</a:t>
+              <a:t>4/5/2026</a:t>
             </a:fld>
             <a:endParaRPr lang="en-US"/>
           </a:p>
@@ -3371,7 +3386,7 @@
             </a:pPr>
             <a:fld id="{08395586-F03A-48D1-94DF-16B239DF4FB5}" type="slidenum">
               <a:rPr lang="en-US"/>
-              <a:t>&lt;#&gt;</a:t>
+              <a:t>‹#›</a:t>
             </a:fld>
             <a:endParaRPr lang="en-US"/>
           </a:p>
@@ -3386,7 +3401,7 @@
 </file>
 
 <file path=ppt/slideLayouts/slideLayout9.xml><?xml version="1.0" encoding="utf-8"?>
-<p:sldLayout xmlns:a="http://schemas.openxmlformats.org/drawingml/2006/main" xmlns:r="http://schemas.openxmlformats.org/officeDocument/2006/relationships" xmlns:p="http://schemas.openxmlformats.org/presentationml/2006/main" xmlns:m="http://schemas.openxmlformats.org/officeDocument/2006/math" xmlns:w="http://schemas.openxmlformats.org/wordprocessingml/2006/main" matchingName="" preserve="1" showMasterPhAnim="0" showMasterSp="1" type="picTx" userDrawn="1">
+<p:sldLayout xmlns:a="http://schemas.openxmlformats.org/drawingml/2006/main" xmlns:r="http://schemas.openxmlformats.org/officeDocument/2006/relationships" xmlns:p="http://schemas.openxmlformats.org/presentationml/2006/main" showMasterPhAnim="0" type="picTx" preserve="1" userDrawn="1">
   <p:cSld name="Picture with Caption">
     <p:spTree>
       <p:nvGrpSpPr>
@@ -3433,7 +3448,6 @@
               <a:rPr lang="en-US"/>
               <a:t>Click to edit Master title style</a:t>
             </a:r>
-            <a:endParaRPr lang="en-US"/>
           </a:p>
         </p:txBody>
       </p:sp>
@@ -3441,14 +3455,14 @@
         <p:nvSpPr>
           <p:cNvPr id="85465178" name="Picture Placeholder 2"/>
           <p:cNvSpPr>
-            <a:spLocks noChangeAspect="1" noGrp="1"/>
+            <a:spLocks noGrp="1" noChangeAspect="1"/>
           </p:cNvSpPr>
           <p:nvPr>
             <p:ph type="pic" idx="1"/>
           </p:nvPr>
         </p:nvSpPr>
         <p:spPr bwMode="auto">
-          <a:xfrm flipH="0" flipV="0">
+          <a:xfrm>
             <a:off x="5183187" y="457199"/>
             <a:ext cx="6172200" cy="5403849"/>
           </a:xfrm>
@@ -3501,7 +3515,6 @@
               <a:rPr lang="en-US"/>
               <a:t>Click icon to add picture</a:t>
             </a:r>
-            <a:endParaRPr lang="en-US"/>
           </a:p>
         </p:txBody>
       </p:sp>
@@ -3593,7 +3606,7 @@
             </a:pPr>
             <a:fld id="{BCC18F51-09EC-435C-A3BA-64A766E099C0}" type="datetimeFigureOut">
               <a:rPr lang="en-US"/>
-              <a:t>19/12/2025</a:t>
+              <a:t>4/5/2026</a:t>
             </a:fld>
             <a:endParaRPr lang="en-US"/>
           </a:p>
@@ -3641,7 +3654,7 @@
             </a:pPr>
             <a:fld id="{08395586-F03A-48D1-94DF-16B239DF4FB5}" type="slidenum">
               <a:rPr lang="en-US"/>
-              <a:t>&lt;#&gt;</a:t>
+              <a:t>‹#›</a:t>
             </a:fld>
             <a:endParaRPr lang="en-US"/>
           </a:p>
@@ -3656,14 +3669,15 @@
 </file>
 
 <file path=ppt/slideMasters/slideMaster1.xml><?xml version="1.0" encoding="utf-8"?>
-<p:sldMaster xmlns:a="http://schemas.openxmlformats.org/drawingml/2006/main" xmlns:r="http://schemas.openxmlformats.org/officeDocument/2006/relationships" xmlns:p="http://schemas.openxmlformats.org/presentationml/2006/main" xmlns:m="http://schemas.openxmlformats.org/officeDocument/2006/math" xmlns:w="http://schemas.openxmlformats.org/wordprocessingml/2006/main" preserve="0">
-  <p:cSld name="">
+<p:sldMaster xmlns:a="http://schemas.openxmlformats.org/drawingml/2006/main" xmlns:r="http://schemas.openxmlformats.org/officeDocument/2006/relationships" xmlns:p="http://schemas.openxmlformats.org/presentationml/2006/main">
+  <p:cSld>
     <p:bg>
-      <p:bgPr shadeToTitle="0">
+      <p:bgPr>
         <a:blipFill rotWithShape="1">
           <a:blip r:embed="rId13"/>
           <a:stretch/>
         </a:blipFill>
+        <a:effectLst/>
       </p:bgPr>
     </p:bg>
     <p:spTree>
@@ -3803,7 +3817,6 @@
               <a:rPr lang="en-US"/>
               <a:t>Click to edit Master title style</a:t>
             </a:r>
-            <a:endParaRPr lang="en-US"/>
           </a:p>
         </p:txBody>
       </p:sp>
@@ -3943,7 +3956,6 @@
               <a:rPr lang="en-US"/>
               <a:t>Fifth level</a:t>
             </a:r>
-            <a:endParaRPr lang="en-US"/>
           </a:p>
         </p:txBody>
       </p:sp>
@@ -3985,7 +3997,7 @@
             </a:pPr>
             <a:fld id="{BCC18F51-09EC-435C-A3BA-64A766E099C0}" type="datetimeFigureOut">
               <a:rPr lang="en-US"/>
-              <a:t>19/12/2025</a:t>
+              <a:t>4/5/2026</a:t>
             </a:fld>
             <a:endParaRPr lang="en-US"/>
           </a:p>
@@ -4069,7 +4081,7 @@
             </a:pPr>
             <a:fld id="{08395586-F03A-48D1-94DF-16B239DF4FB5}" type="slidenum">
               <a:rPr lang="en-US"/>
-              <a:t>1</a:t>
+              <a:t>‹#›</a:t>
             </a:fld>
             <a:endParaRPr lang="en-US"/>
           </a:p>
@@ -4375,8 +4387,8 @@
 </file>
 
 <file path=ppt/slides/slide1.xml><?xml version="1.0" encoding="utf-8"?>
-<p:sld xmlns:a="http://schemas.openxmlformats.org/drawingml/2006/main" xmlns:r="http://schemas.openxmlformats.org/officeDocument/2006/relationships" xmlns:p="http://schemas.openxmlformats.org/presentationml/2006/main" xmlns:m="http://schemas.openxmlformats.org/officeDocument/2006/math" xmlns:w="http://schemas.openxmlformats.org/wordprocessingml/2006/main" xmlns:mc="http://schemas.openxmlformats.org/markup-compatibility/2006" showMasterPhAnim="0" showMasterSp="1" show="1">
-  <p:cSld name="">
+<p:sld xmlns:a="http://schemas.openxmlformats.org/drawingml/2006/main" xmlns:r="http://schemas.openxmlformats.org/officeDocument/2006/relationships" xmlns:p="http://schemas.openxmlformats.org/presentationml/2006/main" showMasterPhAnim="0">
+  <p:cSld>
     <p:spTree>
       <p:nvGrpSpPr>
         <p:cNvPr id="1" name=""/>
@@ -4393,44 +4405,51 @@
       </p:grpSpPr>
       <p:sp>
         <p:nvSpPr>
-          <p:cNvPr id="697881785" name="Title 1"/>
-          <p:cNvSpPr>
-            <a:spLocks noGrp="1"/>
-          </p:cNvSpPr>
-          <p:nvPr>
-            <p:ph type="title"/>
-          </p:nvPr>
-        </p:nvSpPr>
-        <p:spPr bwMode="auto">
-          <a:xfrm flipH="0" flipV="0">
-            <a:off x="1716666" y="2095499"/>
-            <a:ext cx="8762999" cy="2053166"/>
-          </a:xfrm>
-        </p:spPr>
-        <p:txBody>
-          <a:bodyPr/>
-          <a:lstStyle>
-            <a:lvl1pPr algn="ctr">
-              <a:defRPr sz="3200" b="0">
-                <a:solidFill>
-                  <a:schemeClr val="bg1"/>
-                </a:solidFill>
-              </a:defRPr>
-            </a:lvl1pPr>
-          </a:lstStyle>
-          <a:p>
-            <a:pPr>
-              <a:defRPr/>
-            </a:pPr>
-            <a:r>
-              <a:rPr lang="en-US" sz="5600" b="0" i="0" u="none" strike="noStrike" cap="none" spc="141">
-                <a:solidFill>
-                  <a:schemeClr val="bg1"/>
-                </a:solidFill>
-              </a:rPr>
-              <a:t>G A L A X Y</a:t>
-            </a:r>
-            <a:endParaRPr sz="5600" spc="141"/>
+          <p:cNvPr id="2" name="Title 1">
+            <a:extLst>
+              <a:ext uri="{FF2B5EF4-FFF2-40B4-BE49-F238E27FC236}">
+                <a16:creationId xmlns:a16="http://schemas.microsoft.com/office/drawing/2014/main" id="{7E2B36B9-F84E-E8A2-99A7-DFBD9CA5C3A1}"/>
+              </a:ext>
+            </a:extLst>
+          </p:cNvPr>
+          <p:cNvSpPr>
+            <a:spLocks noGrp="1"/>
+          </p:cNvSpPr>
+          <p:nvPr>
+            <p:ph type="ctrTitle"/>
+          </p:nvPr>
+        </p:nvSpPr>
+        <p:spPr/>
+        <p:txBody>
+          <a:bodyPr/>
+          <a:lstStyle/>
+          <a:p>
+            <a:endParaRPr lang="en-US"/>
+          </a:p>
+        </p:txBody>
+      </p:sp>
+      <p:sp>
+        <p:nvSpPr>
+          <p:cNvPr id="3" name="Subtitle 2">
+            <a:extLst>
+              <a:ext uri="{FF2B5EF4-FFF2-40B4-BE49-F238E27FC236}">
+                <a16:creationId xmlns:a16="http://schemas.microsoft.com/office/drawing/2014/main" id="{7D77871D-F246-3378-2760-3D0D97FF7F70}"/>
+              </a:ext>
+            </a:extLst>
+          </p:cNvPr>
+          <p:cNvSpPr>
+            <a:spLocks noGrp="1"/>
+          </p:cNvSpPr>
+          <p:nvPr>
+            <p:ph type="subTitle" idx="1"/>
+          </p:nvPr>
+        </p:nvSpPr>
+        <p:spPr/>
+        <p:txBody>
+          <a:bodyPr/>
+          <a:lstStyle/>
+          <a:p>
+            <a:endParaRPr lang="en-US"/>
           </a:p>
         </p:txBody>
       </p:sp>
@@ -4439,19 +4458,11 @@
   <p:clrMapOvr>
     <a:masterClrMapping/>
   </p:clrMapOvr>
-  <mc:AlternateContent xmlns:mc="http://schemas.openxmlformats.org/markup-compatibility/2006">
-    <mc:Choice xmlns:p159="http://schemas.microsoft.com/office/powerpoint/2015/09/main" xmlns:p14="http://schemas.microsoft.com/office/powerpoint/2010/main" Requires="p159">
-      <p:transition p14:dur="2000" advClick="1"/>
-    </mc:Choice>
-    <mc:Fallback>
-      <p:transition advClick="1"/>
-    </mc:Fallback>
-  </mc:AlternateContent>
 </p:sld>
 </file>
 
 <file path=ppt/theme/theme1.xml><?xml version="1.0" encoding="utf-8"?>
-<a:theme xmlns:a="http://schemas.openxmlformats.org/drawingml/2006/main" xmlns:r="http://schemas.openxmlformats.org/officeDocument/2006/relationships" xmlns:p="http://schemas.openxmlformats.org/presentationml/2006/main" name="Galaxy">
+<a:theme xmlns:a="http://schemas.openxmlformats.org/drawingml/2006/main" name="Galaxy">
   <a:themeElements>
     <a:clrScheme name="Violet II">
       <a:dk1>
@@ -4700,7 +4711,7 @@
 </file>
 
 <file path=ppt/theme/theme2.xml><?xml version="1.0" encoding="utf-8"?>
-<a:theme xmlns:a="http://schemas.openxmlformats.org/drawingml/2006/main" xmlns:r="http://schemas.openxmlformats.org/officeDocument/2006/relationships" xmlns:p="http://schemas.openxmlformats.org/presentationml/2006/main" name="Office Theme">
+<a:theme xmlns:a="http://schemas.openxmlformats.org/drawingml/2006/main" name="Office Theme">
   <a:themeElements>
     <a:clrScheme name="Office">
       <a:dk1>
@@ -4903,5 +4914,6 @@
     </a:fmtScheme>
   </a:themeElements>
   <a:objectDefaults/>
+  <a:extraClrSchemeLst/>
 </a:theme>
 </file>